--- a/public/Raiz_Protocol_Presentacion_Oficial.pptx
+++ b/public/Raiz_Protocol_Presentacion_Oficial.pptx
@@ -516,7 +516,7 @@
           <a:p>
             <a:r>
               <a:rPr lang="en-US" dirty="0"/>
-              <a:t>Buenos días. Soy José Alfredo Román Cruz, profesor de ingeniería en sistemas computacionales en el Instituto Tecnológico de Tlaxiaco, en el estado de Oaxaca. En representación de nuestra universidad y de nuestros estudiantes investigadores, presentamos el Protocolo Raíz: una pieza de infraestructura de código abierto construida en Soroban que une a las comunidades originarias con el comercio justo global a través de la red Stellar.</a:t>
+              <a:t>Buenos días. Soy José Alfredo Román Cruz, profesor de ingeniería en sistemas computacionales en el Instituto Tecnológico de Tlaxiaco, en el estado de Oaxaca. En representación de nuestra universidad y de nuestros estudiantes investigadores, presentamos el Protocolo Yucu: una pieza de infraestructura de código abierto construida en Soroban que une a las comunidades originarias con el comercio justo global a través de la red Stellar.</a:t>
             </a:r>
             <a:endParaRPr lang="en-US" dirty="0"/>
           </a:p>
@@ -604,7 +604,7 @@
           <a:p>
             <a:r>
               <a:rPr lang="en-US" dirty="0"/>
-              <a:t>Si un sistema tecnológico le pide a un campesino de 70 años escribir una contraseña en inglés de 24 palabras, está diseñado para excluirlo. Raíz hace que Stellar sea invisible: el productor habla en mixteco, usa un carnet QR físico y cobra sus pesos sin comisiones.</a:t>
+              <a:t>Si un sistema tecnológico le pide a un campesino de 70 años escribir una contraseña en inglés de 24 palabras, está diseñado para excluirlo. Yucu hace que Stellar sea invisible: el productor habla en mixteco, usa un carnet QR físico y cobra sus pesos sin comisiones.</a:t>
             </a:r>
             <a:endParaRPr lang="en-US" dirty="0"/>
           </a:p>
@@ -868,7 +868,7 @@
           <a:p>
             <a:r>
               <a:rPr lang="en-US" dirty="0"/>
-              <a:t>Este proyecto no es anónimo ni tercerizado: es el trabajo de más de 12 estudiantes de ingeniería en sistemas del TecNM Campus Tlaxiaco. Ellos fueron a las comunidades, levantaron los requerimientos, entrevistaron a los presidentes de las cooperativas y están programando los smart contracts en Soroban. Financiar a Raíz a través de Drips y Stellar es financiar directamente a la próxima generación de ingenieros indígenas de México.</a:t>
+              <a:t>Este proyecto no es anónimo ni tercerizado: es el trabajo de más de 12 estudiantes de ingeniería en sistemas del TecNM Campus Tlaxiaco. Ellos fueron a las comunidades, levantaron los requerimientos, entrevistaron a los presidentes de las cooperativas y están programando los smart contracts en Soroban. Financiar a Yucu a través de Drips y Stellar es financiar directamente a la próxima generación de ingenieros indígenas de México.</a:t>
             </a:r>
             <a:endParaRPr lang="en-US" dirty="0"/>
           </a:p>
@@ -1132,7 +1132,7 @@
           <a:p>
             <a:r>
               <a:rPr lang="en-US" dirty="0"/>
-              <a:t>Nuestros estudiantes de ingeniería no formularon este problema desde un escritorio. Viajaron a San José Xochixtlán, San Pablo Tijaltepec y Magdalena Peñasco. Documentaron que las maestras tejedoras y los caficultores realizan el 90% del trabajo físico, pero reciben menos del 10% del dinero. Raíz fue programado para romper este ciclo de intermediación abusiva mediante código.</a:t>
+              <a:t>Nuestros estudiantes de ingeniería no formularon este problema desde un escritorio. Viajaron a San José Xochixtlán, San Pablo Tijaltepec y Magdalena Peñasco. Documentaron que las maestras tejedoras y los caficultores realizan el 90% del trabajo físico, pero reciben menos del 10% del dinero. Yucu fue programado para romper este ciclo de intermediación abusiva mediante código.</a:t>
             </a:r>
             <a:endParaRPr lang="en-US" dirty="0"/>
           </a:p>
@@ -1220,7 +1220,7 @@
           <a:p>
             <a:r>
               <a:rPr lang="en-US" dirty="0"/>
-              <a:t>Esta gráfica representa los datos duros que los estudiantes del TecNM recopilaron en la sierra. En rojo vemos lo que recibe el productor: apenas un 7% en un huipil de casi un año de trabajo o 18% en café de especialidad. La barra naranja es el margen del coyote. La barra verde es lo que garantiza el Protocolo Raíz: 98% neto al creador y 2% al fondo comunal de obras.</a:t>
+              <a:t>Esta gráfica representa los datos duros que los estudiantes del TecNM recopilaron en la sierra. En rojo vemos lo que recibe el productor: apenas un 7% en un huipil de casi un año de trabajo o 18% en café de especialidad. La barra naranja es el margen del coyote. La barra verde es lo que garantiza el Protocolo Yucu: 98% neto al creador y 2% al fondo comunal de obras.</a:t>
             </a:r>
             <a:endParaRPr lang="en-US" dirty="0"/>
           </a:p>
@@ -1308,7 +1308,7 @@
           <a:p>
             <a:r>
               <a:rPr lang="en-US" dirty="0"/>
-              <a:t>Estas son las 4 brigadas reales de estudiantes del TecNM Tlaxiaco que fueron a la sierra. En San Juan Mixtepec documentaron que las artesanas ganan entre 1 y 2 pesos la hora mientras el coyote revende con 1000% de margen. En San José Xochixtlán un huipil tarda 9 meses. En San Juan Ñumí pierden cosechas en libretas viejas. Raíz fue diseñada a partir de estos testimonios reales.</a:t>
+              <a:t>Estas son las 4 brigadas reales de estudiantes del TecNM Tlaxiaco que fueron a la sierra. En San Juan Mixtepec documentaron que las artesanas ganan entre 1 y 2 pesos la hora mientras el coyote revende con 1000% de margen. En San José Xochixtlán un huipil tarda 9 meses. En San Juan Ñumí pierden cosechas en libretas viejas. Yucu fue diseñada a partir de estos testimonios reales.</a:t>
             </a:r>
             <a:endParaRPr lang="en-US" dirty="0"/>
           </a:p>
@@ -1396,7 +1396,7 @@
           <a:p>
             <a:r>
               <a:rPr lang="en-US" dirty="0"/>
-              <a:t>Esta lámina demuestra que la ingeniería de Raíz no es teórica. Los estudiantes llevaron celulares a las comunidades, midieron tiempos con cronómetro e identificaron el miedo al error de Doña Reyna y Doña Francisca. Gracias a ello se creó el Modo Abuelo de 112px, con voz en Mixteco y etiquetas QR físicas que reducen la fricción cognitiva a cero.</a:t>
+              <a:t>Esta lámina demuestra que la ingeniería de Yucu no es teórica. Los estudiantes llevaron celulares a las comunidades, midieron tiempos con cronómetro e identificaron el miedo al error de una tejedora triqui y una bordadora de Tijaltepec. Gracias a ello se creó el Modo Abuelo de 112px, con voz en Mixteco y etiquetas QR físicas que reducen la fricción cognitiva a cero.</a:t>
             </a:r>
             <a:endParaRPr lang="en-US" dirty="0"/>
           </a:p>
@@ -4768,7 +4768,7 @@
                 <a:ea typeface="Arial" pitchFamily="34" charset="-122"/>
                 <a:cs typeface="Arial" pitchFamily="34" charset="-120"/>
               </a:rPr>
-              <a:t>Repositorio público y activo en github.com/Open-Hub-Tec/raiz con contribuciones diarias de alumnos residentes.</a:t>
+              <a:t>Repositorio público y activo en github.com/Open-Hub-Tec/yucu con contribuciones diarias de alumnos residentes.</a:t>
             </a:r>
             <a:endParaRPr lang="en-US" sz="1100" dirty="0"/>
           </a:p>
@@ -5591,7 +5591,7 @@
                 <a:ea typeface="Arial" pitchFamily="34" charset="-122"/>
                 <a:cs typeface="Arial" pitchFamily="34" charset="-120"/>
               </a:rPr>
-              <a:t>Jazlynn Barrios Velasco (23620209)</a:t>
+              <a:t>Jazlynn Barrios Velasco</a:t>
             </a:r>
             <a:endParaRPr lang="en-US" sz="900" dirty="0"/>
           </a:p>
@@ -5669,7 +5669,7 @@
                 <a:ea typeface="Arial" pitchFamily="34" charset="-122"/>
                 <a:cs typeface="Arial" pitchFamily="34" charset="-120"/>
               </a:rPr>
-              <a:t>Isaías Brayan López Domínguez (23620031)</a:t>
+              <a:t>Isaías Brayan López Domínguez</a:t>
             </a:r>
             <a:endParaRPr lang="en-US" sz="900" dirty="0"/>
           </a:p>
@@ -5747,7 +5747,7 @@
                 <a:ea typeface="Arial" pitchFamily="34" charset="-122"/>
                 <a:cs typeface="Arial" pitchFamily="34" charset="-120"/>
               </a:rPr>
-              <a:t>Rafael Ayala Coronel (23620203), Alex Victoria (23620281)</a:t>
+              <a:t>Rafael Ayala Coronel, Alex Victoria</a:t>
             </a:r>
             <a:endParaRPr lang="en-US" sz="900" dirty="0"/>
           </a:p>
@@ -7027,7 +7027,7 @@
                 <a:ea typeface="Arial" pitchFamily="34" charset="-122"/>
                 <a:cs typeface="Arial" pitchFamily="34" charset="-120"/>
               </a:rPr>
-              <a:t>Presentar a Raíz en Lisboa como demostración insignia de la utilidad de Soroban en la economía real, con compras transfronterizas en vivo entre Europa y comunidades oaxaqueñas.</a:t>
+              <a:t>Presentar a Yucu en Lisboa como demostración insignia de la utilidad de Soroban en la economía real, con compras transfronterizas en vivo entre Europa y comunidades oaxaqueñas.</a:t>
             </a:r>
             <a:endParaRPr lang="en-US" sz="1100" dirty="0"/>
           </a:p>
@@ -7388,7 +7388,7 @@
                 <a:ea typeface="Arial" pitchFamily="34" charset="-122"/>
                 <a:cs typeface="Arial" pitchFamily="34" charset="-120"/>
               </a:rPr>
-              <a:t>https://github.com/Open-Hub-Tec/raiz</a:t>
+              <a:t>https://github.com/Open-Hub-Tec/yucu</a:t>
             </a:r>
             <a:endParaRPr lang="en-US" sz="1200" dirty="0"/>
           </a:p>
@@ -8515,7 +8515,7 @@
                 <a:ea typeface="Arial" pitchFamily="34" charset="-122"/>
                 <a:cs typeface="Arial" pitchFamily="34" charset="-120"/>
               </a:rPr>
-              <a:t>Con Raíz (Soroban)</a:t>
+              <a:t>Con Yucu (Soroban)</a:t>
             </a:r>
             <a:endParaRPr lang="en-US" sz="850" dirty="0"/>
           </a:p>
@@ -8746,7 +8746,7 @@
                 <a:ea typeface="Arial" pitchFamily="34" charset="-122"/>
                 <a:cs typeface="Arial" pitchFamily="34" charset="-120"/>
               </a:rPr>
-              <a:t>Protocolo Raíz: 98% Directo al Productor</a:t>
+              <a:t>Protocolo Yucu: 98% Directo al Productor</a:t>
             </a:r>
             <a:endParaRPr lang="en-US" sz="800" dirty="0"/>
           </a:p>
@@ -9002,7 +9002,7 @@
                 <a:ea typeface="Arial" pitchFamily="34" charset="-122"/>
                 <a:cs typeface="Arial" pitchFamily="34" charset="-120"/>
               </a:rPr>
-              <a:t>Protocolo Raíz: 98% Directo al Productor</a:t>
+              <a:t>Protocolo Yucu: 98% Directo al Productor</a:t>
             </a:r>
             <a:endParaRPr lang="en-US" sz="800" dirty="0"/>
           </a:p>
@@ -9258,7 +9258,7 @@
                 <a:ea typeface="Arial" pitchFamily="34" charset="-122"/>
                 <a:cs typeface="Arial" pitchFamily="34" charset="-120"/>
               </a:rPr>
-              <a:t>Protocolo Raíz: 98% Directo al Productor</a:t>
+              <a:t>Protocolo Yucu: 98% Directo al Productor</a:t>
             </a:r>
             <a:endParaRPr lang="en-US" sz="800" dirty="0"/>
           </a:p>
@@ -9514,7 +9514,7 @@
                 <a:ea typeface="Arial" pitchFamily="34" charset="-122"/>
                 <a:cs typeface="Arial" pitchFamily="34" charset="-120"/>
               </a:rPr>
-              <a:t>Protocolo Raíz: 98% Directo al Productor</a:t>
+              <a:t>Protocolo Yucu: 98% Directo al Productor</a:t>
             </a:r>
             <a:endParaRPr lang="en-US" sz="800" dirty="0"/>
           </a:p>
@@ -9879,7 +9879,7 @@
                 <a:ea typeface="Arial" pitchFamily="34" charset="-122"/>
                 <a:cs typeface="Arial" pitchFamily="34" charset="-120"/>
               </a:rPr>
-              <a:t>El 88% de los adultos mayores falló en apps bancarias por miedo a picar mal. Con el botón de voz gigante de 112px en lengua mixteca de Raíz, el 96% completó el registro en &lt;4 segundos sin ayuda.</a:t>
+              <a:t>El 88% de los adultos mayores falló en apps bancarias por miedo a picar mal. Con el botón de voz gigante de 112px en lengua mixteca de Yucu, el 96% completó el registro en &lt;4 segundos sin ayuda.</a:t>
             </a:r>
             <a:endParaRPr lang="en-US" sz="1000" dirty="0"/>
           </a:p>
@@ -11847,7 +11847,7 @@
                 <a:ea typeface="Arial" pitchFamily="34" charset="-122"/>
                 <a:cs typeface="Arial" pitchFamily="34" charset="-120"/>
               </a:rPr>
-              <a:t>Doña Francisca (64 años): “Si le colgamos el QR al huipil, ya no lo confundirán con ropa china barata.”</a:t>
+              <a:t>Bordadora de San Pablo Tijaltepec: “Si le colgamos el QR al huipil, ya no lo confundirán con ropa china barata.”</a:t>
             </a:r>
             <a:endParaRPr lang="en-US" sz="800" dirty="0"/>
           </a:p>
@@ -11957,7 +11957,7 @@
                 <a:ea typeface="Arial" pitchFamily="34" charset="-122"/>
                 <a:cs typeface="Arial" pitchFamily="34" charset="-120"/>
               </a:rPr>
-              <a:t>Pruebas de Fricción Cognitiva en Campo con Doña Reyna (56) y Doña Francisca (64) en Patios Rurales (Hito 1.2)</a:t>
+              <a:t>Pruebas de Fricción Cognitiva en Campo con una tejedora triqui (56) y una bordadora de Tijaltepec en Patios Rurales (Hito 1.2)</a:t>
             </a:r>
             <a:endParaRPr lang="en-US" sz="1400" dirty="0"/>
           </a:p>
@@ -12492,7 +12492,7 @@
                 <a:ea typeface="Arial" pitchFamily="34" charset="-122"/>
                 <a:cs typeface="Arial" pitchFamily="34" charset="-120"/>
               </a:rPr>
-              <a:t>2. Arquitectura de Solución Raíz</a:t>
+              <a:t>2. Arquitectura de Solución Yucu</a:t>
             </a:r>
             <a:endParaRPr lang="en-US" sz="1100" dirty="0"/>
           </a:p>
@@ -13083,7 +13083,7 @@
                 <a:ea typeface="Arial" pitchFamily="34" charset="-122"/>
                 <a:cs typeface="Arial" pitchFamily="34" charset="-120"/>
               </a:rPr>
-              <a:t>Doña Francisca entendió el Hang-Tag al instante: “Para que nadie confunda la blusa de venados con ropa china”.</a:t>
+              <a:t>Una bordadora de Tijaltepec entendió el Hang-Tag al instante: “Para que nadie confunda la blusa de venados con ropa china”.</a:t>
             </a:r>
             <a:endParaRPr lang="en-US" sz="850" dirty="0"/>
           </a:p>
@@ -15041,7 +15041,7 @@
                 <a:ea typeface="Arial" pitchFamily="34" charset="-122"/>
                 <a:cs typeface="Arial" pitchFamily="34" charset="-120"/>
               </a:rPr>
-              <a:t>• Maestras Tejedoras (Doña Reyna): </a:t>
+              <a:t>• Maestras Tejedoras (triquis, Xochixtlán): </a:t>
             </a:r>
             <a:pPr indent="0" marL="0">
               <a:lnSpc>
@@ -15779,7 +15779,7 @@
                 <a:ea typeface="Arial" pitchFamily="34" charset="-122"/>
                 <a:cs typeface="Arial" pitchFamily="34" charset="-120"/>
               </a:rPr>
-              <a:t>El comprador escucha a Doña Reyna hablar en su lengua materna Tu’un Savi, conociendo el significado ancestral de cada bordado.</a:t>
+              <a:t>El comprador escucha a la tejedora hablar en su lengua materna Tu’un Savi, conociendo el significado ancestral de cada bordado.</a:t>
             </a:r>
             <a:endParaRPr lang="en-US" sz="1100" dirty="0"/>
           </a:p>
